--- a/outsystems/niveau-2/deel-19/slidedeck.pptx
+++ b/outsystems/niveau-2/deel-19/slidedeck.pptx
@@ -3407,8 +3407,8 @@
         </p:nvSpPr>
         <p:spPr>
           <a:xfrm>
-            <a:off x="640080" y="548640"/>
-            <a:ext cx="10881360" cy="914400"/>
+            <a:off x="640080" y="457200"/>
+            <a:ext cx="10881360" cy="822960"/>
           </a:xfrm>
           <a:prstGeom prst="rect">
             <a:avLst/>
@@ -3442,8 +3442,8 @@
         </p:nvSpPr>
         <p:spPr>
           <a:xfrm>
-            <a:off x="822960" y="1737360"/>
-            <a:ext cx="10515600" cy="4114800"/>
+            <a:off x="640080" y="1463040"/>
+            <a:ext cx="5029200" cy="4937760"/>
           </a:xfrm>
           <a:prstGeom prst="rect">
             <a:avLst/>
@@ -3458,7 +3458,7 @@
           <a:p>
             <a:pPr algn="l"/>
             <a:r>
-              <a:rPr sz="2000" b="0">
+              <a:rPr sz="1700" b="0">
                 <a:solidFill>
                   <a:srgbClr val="14213D"/>
                 </a:solidFill>
@@ -3470,7 +3470,7 @@
           <a:p>
             <a:pPr algn="l"/>
             <a:r>
-              <a:rPr sz="2000" b="0">
+              <a:rPr sz="1700" b="0">
                 <a:solidFill>
                   <a:srgbClr val="14213D"/>
                 </a:solidFill>
@@ -3482,7 +3482,7 @@
           <a:p>
             <a:pPr algn="l"/>
             <a:r>
-              <a:rPr sz="2000" b="0">
+              <a:rPr sz="1700" b="0">
                 <a:solidFill>
                   <a:srgbClr val="14213D"/>
                 </a:solidFill>
@@ -3493,41 +3493,30 @@
           </a:p>
         </p:txBody>
       </p:sp>
-      <p:sp>
-        <p:nvSpPr>
-          <p:cNvPr id="4" name="TextBox 3"/>
-          <p:cNvSpPr txBox="1"/>
+      <p:pic>
+        <p:nvPicPr>
+          <p:cNvPr id="4" name="Picture 3" descr="figuur-19-2.png"/>
+          <p:cNvPicPr>
+            <a:picLocks noChangeAspect="1"/>
+          </p:cNvPicPr>
           <p:nvPr/>
-        </p:nvSpPr>
+        </p:nvPicPr>
+        <p:blipFill>
+          <a:blip r:embed="rId2"/>
+          <a:stretch>
+            <a:fillRect/>
+          </a:stretch>
+        </p:blipFill>
         <p:spPr>
           <a:xfrm>
-            <a:off x="822960" y="5943600"/>
-            <a:ext cx="10515600" cy="731520"/>
+            <a:off x="5852160" y="2519825"/>
+            <a:ext cx="5669280" cy="2915629"/>
           </a:xfrm>
           <a:prstGeom prst="rect">
             <a:avLst/>
           </a:prstGeom>
-          <a:noFill/>
         </p:spPr>
-        <p:txBody>
-          <a:bodyPr wrap="square">
-            <a:spAutoFit/>
-          </a:bodyPr>
-          <a:lstStyle/>
-          <a:p>
-            <a:pPr algn="l"/>
-            <a:r>
-              <a:rPr sz="1300" b="0">
-                <a:solidFill>
-                  <a:srgbClr val="999999"/>
-                </a:solidFill>
-                <a:latin typeface="DM Sans"/>
-              </a:rPr>
-              <a:t>[FIGUUR 19-2: Getrapte uitrol — ODC eerst, dan O11-satellieten]</a:t>
-            </a:r>
-          </a:p>
-        </p:txBody>
-      </p:sp>
+      </p:pic>
     </p:spTree>
   </p:cSld>
   <p:clrMapOvr>
@@ -3670,8 +3659,8 @@
         </p:nvSpPr>
         <p:spPr>
           <a:xfrm>
-            <a:off x="640080" y="548640"/>
-            <a:ext cx="10881360" cy="914400"/>
+            <a:off x="640080" y="457200"/>
+            <a:ext cx="10881360" cy="822960"/>
           </a:xfrm>
           <a:prstGeom prst="rect">
             <a:avLst/>
@@ -3924,8 +3913,8 @@
         </p:nvSpPr>
         <p:spPr>
           <a:xfrm>
-            <a:off x="640080" y="548640"/>
-            <a:ext cx="10881360" cy="914400"/>
+            <a:off x="640080" y="457200"/>
+            <a:ext cx="10881360" cy="822960"/>
           </a:xfrm>
           <a:prstGeom prst="rect">
             <a:avLst/>
@@ -4044,8 +4033,8 @@
         </p:nvSpPr>
         <p:spPr>
           <a:xfrm>
-            <a:off x="640080" y="457200"/>
-            <a:ext cx="10881360" cy="731520"/>
+            <a:off x="640080" y="365760"/>
+            <a:ext cx="10881360" cy="640080"/>
           </a:xfrm>
           <a:prstGeom prst="rect">
             <a:avLst/>
@@ -4060,7 +4049,7 @@
           <a:p>
             <a:pPr algn="l"/>
             <a:r>
-              <a:rPr sz="2600" b="1">
+              <a:rPr sz="2400" b="1">
                 <a:solidFill>
                   <a:srgbClr val="14213D"/>
                 </a:solidFill>
@@ -4080,8 +4069,8 @@
           <p:nvPr/>
         </p:nvGraphicFramePr>
         <p:xfrm>
-          <a:off x="640080" y="1371600"/>
-          <a:ext cx="10881360" cy="2194560"/>
+          <a:off x="640080" y="1097280"/>
+          <a:ext cx="10881360" cy="1828800"/>
         </p:xfrm>
         <a:graphic>
           <a:graphicData uri="http://schemas.openxmlformats.org/drawingml/2006/table">
@@ -4094,7 +4083,7 @@
                 <a:gridCol w="3627120"/>
                 <a:gridCol w="3627120"/>
               </a:tblGrid>
-              <a:tr h="548640">
+              <a:tr h="457200">
                 <a:tc>
                   <a:txBody>
                     <a:bodyPr/>
@@ -4109,7 +4098,7 @@
                     <a:lstStyle/>
                     <a:p>
                       <a:r>
-                        <a:rPr sz="1600" b="1"/>
+                        <a:rPr sz="1400" b="1"/>
                         <a:t>O11 — LifeTime</a:t>
                       </a:r>
                     </a:p>
@@ -4122,7 +4111,7 @@
                     <a:lstStyle/>
                     <a:p>
                       <a:r>
-                        <a:rPr sz="1600" b="1"/>
+                        <a:rPr sz="1400" b="1"/>
                         <a:t>ODC — pipelines</a:t>
                       </a:r>
                     </a:p>
@@ -4130,14 +4119,14 @@
                   <a:tcPr/>
                 </a:tc>
               </a:tr>
-              <a:tr h="548640">
+              <a:tr h="457200">
                 <a:tc>
                   <a:txBody>
                     <a:bodyPr/>
                     <a:lstStyle/>
                     <a:p>
                       <a:r>
-                        <a:rPr sz="1600"/>
+                        <a:rPr sz="1400"/>
                         <a:t>Kernfunctie</a:t>
                       </a:r>
                     </a:p>
@@ -4150,7 +4139,7 @@
                     <a:lstStyle/>
                     <a:p>
                       <a:r>
-                        <a:rPr sz="1600"/>
+                        <a:rPr sz="1400"/>
                         <a:t>Promotie + governance</a:t>
                       </a:r>
                     </a:p>
@@ -4163,7 +4152,7 @@
                     <a:lstStyle/>
                     <a:p>
                       <a:r>
-                        <a:rPr sz="1600"/>
+                        <a:rPr sz="1400"/>
                         <a:t>Build-test-deploy geautomatiseerd</a:t>
                       </a:r>
                     </a:p>
@@ -4171,14 +4160,14 @@
                   <a:tcPr/>
                 </a:tc>
               </a:tr>
-              <a:tr h="548640">
+              <a:tr h="457200">
                 <a:tc>
                   <a:txBody>
                     <a:bodyPr/>
                     <a:lstStyle/>
                     <a:p>
                       <a:r>
-                        <a:rPr sz="1600"/>
+                        <a:rPr sz="1400"/>
                         <a:t>Automatisering</a:t>
                       </a:r>
                     </a:p>
@@ -4191,7 +4180,7 @@
                     <a:lstStyle/>
                     <a:p>
                       <a:r>
-                        <a:rPr sz="1600"/>
+                        <a:rPr sz="1400"/>
                         <a:t>Aanvullende laag, zelf op te zetten</a:t>
                       </a:r>
                     </a:p>
@@ -4204,7 +4193,7 @@
                     <a:lstStyle/>
                     <a:p>
                       <a:r>
-                        <a:rPr sz="1600"/>
+                        <a:rPr sz="1400"/>
                         <a:t>Vanaf de basis ontworpen</a:t>
                       </a:r>
                     </a:p>
@@ -4212,14 +4201,14 @@
                   <a:tcPr/>
                 </a:tc>
               </a:tr>
-              <a:tr h="548640">
+              <a:tr h="457200">
                 <a:tc>
                   <a:txBody>
                     <a:bodyPr/>
                     <a:lstStyle/>
                     <a:p>
                       <a:r>
-                        <a:rPr sz="1600"/>
+                        <a:rPr sz="1400"/>
                         <a:t>Onderliggend principe</a:t>
                       </a:r>
                     </a:p>
@@ -4232,7 +4221,7 @@
                     <a:lstStyle/>
                     <a:p>
                       <a:r>
-                        <a:rPr sz="1600"/>
+                        <a:rPr sz="1400"/>
                         <a:t>Gecontroleerde, traceerbare promotie</a:t>
                       </a:r>
                     </a:p>
@@ -4245,7 +4234,7 @@
                     <a:lstStyle/>
                     <a:p>
                       <a:r>
-                        <a:rPr sz="1600"/>
+                        <a:rPr sz="1400"/>
                         <a:t>Gelijk</a:t>
                       </a:r>
                     </a:p>
@@ -4257,6 +4246,30 @@
           </a:graphicData>
         </a:graphic>
       </p:graphicFrame>
+      <p:pic>
+        <p:nvPicPr>
+          <p:cNvPr id="4" name="Picture 3" descr="figuur-19-1.png"/>
+          <p:cNvPicPr>
+            <a:picLocks noChangeAspect="1"/>
+          </p:cNvPicPr>
+          <p:nvPr/>
+        </p:nvPicPr>
+        <p:blipFill>
+          <a:blip r:embed="rId2"/>
+          <a:stretch>
+            <a:fillRect/>
+          </a:stretch>
+        </p:blipFill>
+        <p:spPr>
+          <a:xfrm>
+            <a:off x="2702560" y="3200400"/>
+            <a:ext cx="6756400" cy="3474720"/>
+          </a:xfrm>
+          <a:prstGeom prst="rect">
+            <a:avLst/>
+          </a:prstGeom>
+        </p:spPr>
+      </p:pic>
     </p:spTree>
   </p:cSld>
   <p:clrMapOvr>
